--- a/canvas_material/lectures/powerpoint/Session01-CourseLaunch.pptx
+++ b/canvas_material/lectures/powerpoint/Session01-CourseLaunch.pptx
@@ -1403,7 +1403,7 @@
           <a:p>
             <a:r>
               <a:rPr lang="en-US" dirty="0"/>
-              <a:t>Keep this tight — do NOT read the syllabus aloud; point them to the LMS. Say the workload plainly: about 10 hours a week (roughly 2.5 in class, 7.5 outside). Stress that process and founding artifacts carry real weight — strong code alone won't compensate. On AI: it's a tool, not the topic — fine for brainstorming, learning, and drafting, but they must understand and be able to defend everything they submit. Fill the placeholder card with your actual syllabus items before class. ~2-3 min.</a:t>
+              <a:t>Keep this tight — do NOT read the syllabus aloud; point them to Canvas. Say the workload plainly: about 10 hours a week (roughly 2.5 in class, 7.5 outside). Stress that process and founding artifacts carry real weight — strong code alone won't compensate. On AI: it's a tool, not the topic — fine for brainstorming, learning, and drafting, but they must understand and be able to defend everything they submit. The amber card is the whole message: it's all in Canvas, and they are expected to read the syllabus this week. Don't walk the bullets one by one. ~2-3 min.</a:t>
             </a:r>
             <a:endParaRPr lang="en-US" dirty="0"/>
           </a:p>
@@ -12273,7 +12273,7 @@
                 <a:ea typeface="Calibri" pitchFamily="34" charset="-122"/>
                 <a:cs typeface="Calibri" pitchFamily="34" charset="-120"/>
               </a:rPr>
-              <a:t>SYLLABUS TOPICS</a:t>
+              <a:t>IT'S ALL IN CANVAS</a:t>
             </a:r>
             <a:endParaRPr lang="en-US" sz="1600" dirty="0"/>
           </a:p>
@@ -12287,8 +12287,8 @@
         </p:nvSpPr>
         <p:spPr>
           <a:xfrm>
-            <a:off x="7772400" y="2880360"/>
-            <a:ext cx="3566160" cy="320040"/>
+            <a:off x="7772400" y="2761488"/>
+            <a:ext cx="3566160" cy="457200"/>
           </a:xfrm>
           <a:prstGeom prst="rect">
             <a:avLst/>
@@ -12304,15 +12304,15 @@
               <a:buNone/>
             </a:pPr>
             <a:r>
-              <a:rPr lang="en-US" sz="1400" b="1" i="1" dirty="0">
-                <a:solidFill>
-                  <a:srgbClr val="A9791F"/>
-                </a:solidFill>
-                <a:latin typeface="Calibri" pitchFamily="34" charset="0"/>
-                <a:ea typeface="Calibri" pitchFamily="34" charset="-122"/>
-                <a:cs typeface="Calibri" pitchFamily="34" charset="-120"/>
-              </a:rPr>
-              <a:t>[ PLACEHOLDER — add your syllabus items ]</a:t>
+              <a:rPr lang="en-US" sz="1400" dirty="0">
+                <a:solidFill>
+                  <a:srgbClr val="1E2A36"/>
+                </a:solidFill>
+                <a:latin typeface="Calibri" pitchFamily="34" charset="0"/>
+                <a:ea typeface="Calibri" pitchFamily="34" charset="-122"/>
+                <a:cs typeface="Calibri" pitchFamily="34" charset="-120"/>
+              </a:rPr>
+              <a:t>Syllabus, schedule, rubrics, and every handout live in Canvas.</a:t>
             </a:r>
             <a:endParaRPr lang="en-US" sz="1400" dirty="0"/>
           </a:p>
@@ -12326,8 +12326,8 @@
         </p:nvSpPr>
         <p:spPr>
           <a:xfrm>
-            <a:off x="7818120" y="3291840"/>
-            <a:ext cx="3566160" cy="1645920"/>
+            <a:off x="7818120" y="3273552"/>
+            <a:ext cx="3566160" cy="1234440"/>
           </a:xfrm>
           <a:prstGeom prst="rect">
             <a:avLst/>
@@ -12403,9 +12403,6 @@
           </a:p>
           <a:p>
             <a:pPr marL="177800" indent="-177800">
-              <a:spcAft>
-                <a:spcPts val="600"/>
-              </a:spcAft>
               <a:buSzPct val="100000"/>
               <a:buChar char="•"/>
             </a:pPr>
@@ -12422,29 +12419,50 @@
             </a:r>
             <a:endParaRPr lang="en-US" sz="1450" dirty="0"/>
           </a:p>
-          <a:p>
-            <a:pPr marL="177800" indent="-177800">
-              <a:buSzPct val="100000"/>
-              <a:buChar char="•"/>
-            </a:pPr>
-            <a:r>
-              <a:rPr lang="en-US" sz="1450" dirty="0">
-                <a:solidFill>
-                  <a:srgbClr val="1E2A36"/>
-                </a:solidFill>
-                <a:latin typeface="Calibri" pitchFamily="34" charset="0"/>
-                <a:ea typeface="Calibri" pitchFamily="34" charset="-122"/>
-                <a:cs typeface="Calibri" pitchFamily="34" charset="-120"/>
-              </a:rPr>
-              <a:t>where everything lives (LMS)</a:t>
-            </a:r>
-            <a:endParaRPr lang="en-US" sz="1450" dirty="0"/>
-          </a:p>
         </p:txBody>
       </p:sp>
       <p:sp>
         <p:nvSpPr>
           <p:cNvPr id="26" name="Text 20"/>
+          <p:cNvSpPr/>
+          <p:nvPr/>
+        </p:nvSpPr>
+        <p:spPr>
+          <a:xfrm>
+            <a:off x="7818120" y="4553712"/>
+            <a:ext cx="3566160" cy="365760"/>
+          </a:xfrm>
+          <a:prstGeom prst="rect">
+            <a:avLst/>
+          </a:prstGeom>
+          <a:noFill/>
+          <a:ln/>
+        </p:spPr>
+        <p:txBody>
+          <a:bodyPr wrap="square" lIns="0" tIns="0" rIns="0" bIns="0" rtlCol="0" anchor="ctr"/>
+          <a:lstStyle/>
+          <a:p>
+            <a:pPr indent="0" marL="0">
+              <a:buNone/>
+            </a:pPr>
+            <a:r>
+              <a:rPr lang="en-US" sz="1500" b="1" dirty="0">
+                <a:solidFill>
+                  <a:srgbClr val="A9791F"/>
+                </a:solidFill>
+                <a:latin typeface="Calibri" pitchFamily="34" charset="0"/>
+                <a:ea typeface="Calibri" pitchFamily="34" charset="-122"/>
+                <a:cs typeface="Calibri" pitchFamily="34" charset="-120"/>
+              </a:rPr>
+              <a:t>Read the syllabus this week.</a:t>
+            </a:r>
+            <a:endParaRPr lang="en-US" sz="1500" dirty="0"/>
+          </a:p>
+        </p:txBody>
+      </p:sp>
+      <p:sp>
+        <p:nvSpPr>
+          <p:cNvPr id="27" name="Text 21"/>
           <p:cNvSpPr/>
           <p:nvPr/>
         </p:nvSpPr>
@@ -12475,7 +12493,7 @@
                 <a:ea typeface="Calibri" pitchFamily="34" charset="-122"/>
                 <a:cs typeface="Calibri" pitchFamily="34" charset="-120"/>
               </a:rPr>
-              <a:t>Keep this segment tight — resist reading the syllabus aloud; point them to the LMS.</a:t>
+              <a:t>Keep this segment tight — resist reading the syllabus aloud; point them to Canvas.</a:t>
             </a:r>
             <a:endParaRPr lang="en-US" sz="1400" dirty="0"/>
           </a:p>
@@ -12483,7 +12501,7 @@
       </p:sp>
       <p:sp>
         <p:nvSpPr>
-          <p:cNvPr id="27" name="Text 21"/>
+          <p:cNvPr id="28" name="Text 22"/>
           <p:cNvSpPr/>
           <p:nvPr/>
         </p:nvSpPr>
@@ -12522,7 +12540,7 @@
       </p:sp>
       <p:sp>
         <p:nvSpPr>
-          <p:cNvPr id="28" name="Text 22"/>
+          <p:cNvPr id="29" name="Text 23"/>
           <p:cNvSpPr/>
           <p:nvPr/>
         </p:nvSpPr>
@@ -20017,7 +20035,7 @@
             <a:r>
               <a:rPr lang="en-US" sz="1700" b="1" dirty="0">
                 <a:solidFill>
-                  <a:srgbClr val="E8A33D"/>
+                  <a:srgbClr val="A9791F"/>
                 </a:solidFill>
                 <a:latin typeface="Calibri" pitchFamily="34" charset="0"/>
                 <a:ea typeface="Calibri" pitchFamily="34" charset="-122"/>
@@ -21153,8 +21171,8 @@
         </p:nvSpPr>
         <p:spPr>
           <a:xfrm>
-            <a:off x="548640" y="6080760"/>
-            <a:ext cx="7040880" cy="320040"/>
+            <a:off x="548640" y="6053328"/>
+            <a:ext cx="7040880" cy="365760"/>
           </a:xfrm>
           <a:prstGeom prst="rect">
             <a:avLst/>
@@ -21178,7 +21196,7 @@
                 <a:ea typeface="Calibri" pitchFamily="34" charset="-122"/>
                 <a:cs typeface="Calibri" pitchFamily="34" charset="-120"/>
               </a:rPr>
-              <a:t>These are the course outcomes — what you'll do by end of term — distinct from today's session objectives.</a:t>
+              <a:t>Course outcomes — what you'll do by end of term, not today's objectives.</a:t>
             </a:r>
             <a:endParaRPr lang="en-US" sz="1350" dirty="0"/>
           </a:p>
